--- a/resources/presentations/Lunch-Is-Packed-Module-06-know-the-sewing-machine.pptx
+++ b/resources/presentations/Lunch-Is-Packed-Module-06-know-the-sewing-machine.pptx
@@ -2,20 +2,20 @@
 <file path=ppt/presentation.xml><?xml version="1.0" encoding="utf-8"?>
 <p:presentation xmlns:p="http://schemas.openxmlformats.org/presentationml/2006/main">
   <p:sldMasterIdLst>
-    <p:sldMasterId xmlns:r="http://schemas.openxmlformats.org/officeDocument/2006/relationships" id="2147483648" r:id="R72d54b66260343c9"/>
+    <p:sldMasterId xmlns:r="http://schemas.openxmlformats.org/officeDocument/2006/relationships" id="2147483648" r:id="Rd5088bb5d5a24fc3"/>
   </p:sldMasterIdLst>
   <p:notesMasterIdLst>
-    <p:notesMasterId xmlns:r="http://schemas.openxmlformats.org/officeDocument/2006/relationships" r:id="R6e3118bc17be4917"/>
+    <p:notesMasterId xmlns:r="http://schemas.openxmlformats.org/officeDocument/2006/relationships" r:id="Rec9ec311bee64a3f"/>
   </p:notesMasterIdLst>
   <p:sldIdLst>
-    <p:sldId xmlns:r="http://schemas.openxmlformats.org/officeDocument/2006/relationships" id="256" r:id="R48396718769746ff"/>
-    <p:sldId xmlns:r="http://schemas.openxmlformats.org/officeDocument/2006/relationships" id="257" r:id="Rc1e75afb3b40475d"/>
-    <p:sldId xmlns:r="http://schemas.openxmlformats.org/officeDocument/2006/relationships" id="258" r:id="Rb2e3a3ea88d1467a"/>
-    <p:sldId xmlns:r="http://schemas.openxmlformats.org/officeDocument/2006/relationships" id="259" r:id="Ree701bee3f5f4e1e"/>
-    <p:sldId xmlns:r="http://schemas.openxmlformats.org/officeDocument/2006/relationships" id="260" r:id="R8f94546fe2a64eea"/>
-    <p:sldId xmlns:r="http://schemas.openxmlformats.org/officeDocument/2006/relationships" id="261" r:id="R5ed56cedbb194a10"/>
-    <p:sldId xmlns:r="http://schemas.openxmlformats.org/officeDocument/2006/relationships" id="262" r:id="Rf423be1ac9864ef3"/>
-    <p:sldId xmlns:r="http://schemas.openxmlformats.org/officeDocument/2006/relationships" id="263" r:id="Rc0ba3947c21b4088"/>
+    <p:sldId xmlns:r="http://schemas.openxmlformats.org/officeDocument/2006/relationships" id="256" r:id="Rf222e4b3004f4a9b"/>
+    <p:sldId xmlns:r="http://schemas.openxmlformats.org/officeDocument/2006/relationships" id="257" r:id="R226cd1855b254a11"/>
+    <p:sldId xmlns:r="http://schemas.openxmlformats.org/officeDocument/2006/relationships" id="258" r:id="R83d86d385d9f4be8"/>
+    <p:sldId xmlns:r="http://schemas.openxmlformats.org/officeDocument/2006/relationships" id="259" r:id="R08f71687b9244097"/>
+    <p:sldId xmlns:r="http://schemas.openxmlformats.org/officeDocument/2006/relationships" id="260" r:id="R044f4fa28a16497f"/>
+    <p:sldId xmlns:r="http://schemas.openxmlformats.org/officeDocument/2006/relationships" id="261" r:id="Rff03c674ac8d4a45"/>
+    <p:sldId xmlns:r="http://schemas.openxmlformats.org/officeDocument/2006/relationships" id="262" r:id="R7bec5ecc344b41df"/>
+    <p:sldId xmlns:r="http://schemas.openxmlformats.org/officeDocument/2006/relationships" id="263" r:id="Rfe500ae4c0894a46"/>
   </p:sldIdLst>
   <p:sldSz cx="12192000" cy="6858000"/>
   <p:notesSz cx="6858000" cy="9144000"/>
@@ -1127,7 +1127,7 @@
   </p:cSld>
   <p:clrMap bg1="lt1" tx1="dk1" bg2="lt2" tx2="dk2" accent1="accent1" accent2="accent2" accent3="accent3" accent4="accent4" accent5="accent5" accent6="accent6" hlink="hlink" folHlink="folHlink"/>
   <p:sldLayoutIdLst>
-    <p:sldLayoutId xmlns:r="http://schemas.openxmlformats.org/officeDocument/2006/relationships" id="2147483649" r:id="R2fe3da0d5ef348b8"/>
+    <p:sldLayoutId xmlns:r="http://schemas.openxmlformats.org/officeDocument/2006/relationships" id="2147483649" r:id="R8239e0ab238343d2"/>
   </p:sldLayoutIdLst>
   <p:txStyles>
     <p:titleStyle>
@@ -1678,7 +1678,7 @@
           <p:cNvPr id="7" name="title-plane">
             <a:extLst xmlns:a="http://schemas.openxmlformats.org/drawingml/2006/main">
               <a:ext uri="{FF2B5EF4-FFF2-40B4-BE49-F238E27FC236}">
-                <a16:creationId xmlns:a16="http://schemas.microsoft.com/office/drawing/2014/main" id="{8E279817-7056-4A94-AEA4-9EEBD0EFC3E7}"/>
+                <a16:creationId xmlns:a16="http://schemas.microsoft.com/office/drawing/2014/main" id="{8B26E829-A247-4C92-808D-71304AA42D10}"/>
               </a:ext>
             </a:extLst>
           </p:cNvPr>
@@ -1713,8 +1713,8 @@
           <p:nvPr/>
         </p:nvPicPr>
         <p:blipFill>
-          <a:blip xmlns:r="http://schemas.openxmlformats.org/officeDocument/2006/relationships" xmlns:a="http://schemas.openxmlformats.org/drawingml/2006/main" r:embed="R62436ad2d4dc4c08"/>
-          <a:srcRect xmlns:a="http://schemas.openxmlformats.org/drawingml/2006/main" l="30134" t="0" r="30134" b="0"/>
+          <a:blip xmlns:r="http://schemas.openxmlformats.org/officeDocument/2006/relationships" xmlns:a="http://schemas.openxmlformats.org/drawingml/2006/main" r:embed="Ra96f91a237734900"/>
+          <a:srcRect xmlns:a="http://schemas.openxmlformats.org/drawingml/2006/main" l="24074" t="0" r="24074" b="0"/>
           <a:stretch xmlns:a="http://schemas.openxmlformats.org/drawingml/2006/main">
             <a:fillRect l="0" t="0" r="0" b="0"/>
           </a:stretch>
@@ -1734,7 +1734,7 @@
           <p:cNvPr id="3" name="module-kicker">
             <a:extLst xmlns:a="http://schemas.openxmlformats.org/drawingml/2006/main">
               <a:ext uri="{FF2B5EF4-FFF2-40B4-BE49-F238E27FC236}">
-                <a16:creationId xmlns:a16="http://schemas.microsoft.com/office/drawing/2014/main" id="{0BDE2528-23B8-47EE-B92F-D9736D39896C}"/>
+                <a16:creationId xmlns:a16="http://schemas.microsoft.com/office/drawing/2014/main" id="{22A6F2FD-FFDF-4B93-A881-77E3BB74E964}"/>
               </a:ext>
             </a:extLst>
           </p:cNvPr>
@@ -1784,7 +1784,7 @@
           <p:cNvPr id="4" name="deck-title">
             <a:extLst xmlns:a="http://schemas.openxmlformats.org/drawingml/2006/main">
               <a:ext uri="{FF2B5EF4-FFF2-40B4-BE49-F238E27FC236}">
-                <a16:creationId xmlns:a16="http://schemas.microsoft.com/office/drawing/2014/main" id="{2ECB4476-9399-4C60-AF99-84EC4F49DCF5}"/>
+                <a16:creationId xmlns:a16="http://schemas.microsoft.com/office/drawing/2014/main" id="{92EA9818-1AA5-4094-B7DD-5EF576B19DE2}"/>
               </a:ext>
             </a:extLst>
           </p:cNvPr>
@@ -1834,7 +1834,7 @@
           <p:cNvPr id="5" name="deck-subtitle">
             <a:extLst xmlns:a="http://schemas.openxmlformats.org/drawingml/2006/main">
               <a:ext uri="{FF2B5EF4-FFF2-40B4-BE49-F238E27FC236}">
-                <a16:creationId xmlns:a16="http://schemas.microsoft.com/office/drawing/2014/main" id="{3E2528E1-8AAF-4886-AE05-C1822DBFB357}"/>
+                <a16:creationId xmlns:a16="http://schemas.microsoft.com/office/drawing/2014/main" id="{E3DD8D6E-32C4-4D09-A5EA-421D152234B0}"/>
               </a:ext>
             </a:extLst>
           </p:cNvPr>
@@ -1884,7 +1884,7 @@
           <p:cNvPr id="6" name="deck-footer">
             <a:extLst xmlns:a="http://schemas.openxmlformats.org/drawingml/2006/main">
               <a:ext uri="{FF2B5EF4-FFF2-40B4-BE49-F238E27FC236}">
-                <a16:creationId xmlns:a16="http://schemas.microsoft.com/office/drawing/2014/main" id="{EFF68312-26D2-427B-A7E7-7DDBA9303FB3}"/>
+                <a16:creationId xmlns:a16="http://schemas.microsoft.com/office/drawing/2014/main" id="{1A01D08D-C6B0-434B-9DA9-8C8DC13B0C08}"/>
               </a:ext>
             </a:extLst>
           </p:cNvPr>
@@ -1932,7 +1932,7 @@
     </p:spTree>
     <p:extLst>
       <p:ext uri="{BB962C8B-B14F-4D97-AF65-F5344CB8AC3E}">
-        <p14:creationId xmlns:p14="http://schemas.microsoft.com/office/powerpoint/2010/main" val="1434957718"/>
+        <p14:creationId xmlns:p14="http://schemas.microsoft.com/office/powerpoint/2010/main" val="1664563805"/>
       </p:ext>
     </p:extLst>
   </p:cSld>
@@ -1963,7 +1963,7 @@
           <p:cNvPr id="15" name="top-rule">
             <a:extLst xmlns:a="http://schemas.openxmlformats.org/drawingml/2006/main">
               <a:ext uri="{FF2B5EF4-FFF2-40B4-BE49-F238E27FC236}">
-                <a16:creationId xmlns:a16="http://schemas.microsoft.com/office/drawing/2014/main" id="{1B50C42E-3939-4D65-92F8-D02EDC359C49}"/>
+                <a16:creationId xmlns:a16="http://schemas.microsoft.com/office/drawing/2014/main" id="{9F5E78A4-0858-4C30-8E1E-C1E2CDFC0FAA}"/>
               </a:ext>
             </a:extLst>
           </p:cNvPr>
@@ -1994,7 +1994,7 @@
           <p:cNvPr id="2" name="course-label">
             <a:extLst xmlns:a="http://schemas.openxmlformats.org/drawingml/2006/main">
               <a:ext uri="{FF2B5EF4-FFF2-40B4-BE49-F238E27FC236}">
-                <a16:creationId xmlns:a16="http://schemas.microsoft.com/office/drawing/2014/main" id="{8E8EC695-2116-42C5-B693-386B2B8D76D6}"/>
+                <a16:creationId xmlns:a16="http://schemas.microsoft.com/office/drawing/2014/main" id="{1FF09A95-6D8F-44AE-B4C3-314747155333}"/>
               </a:ext>
             </a:extLst>
           </p:cNvPr>
@@ -2044,7 +2044,7 @@
           <p:cNvPr id="3" name="module-label">
             <a:extLst xmlns:a="http://schemas.openxmlformats.org/drawingml/2006/main">
               <a:ext uri="{FF2B5EF4-FFF2-40B4-BE49-F238E27FC236}">
-                <a16:creationId xmlns:a16="http://schemas.microsoft.com/office/drawing/2014/main" id="{DC1AB7E5-4490-4FF6-93C0-9A78773173BB}"/>
+                <a16:creationId xmlns:a16="http://schemas.microsoft.com/office/drawing/2014/main" id="{1A2A27FD-BDD3-4585-9D4A-09BE502A136D}"/>
               </a:ext>
             </a:extLst>
           </p:cNvPr>
@@ -2094,7 +2094,7 @@
           <p:cNvPr id="4" name="slide-title">
             <a:extLst xmlns:a="http://schemas.openxmlformats.org/drawingml/2006/main">
               <a:ext uri="{FF2B5EF4-FFF2-40B4-BE49-F238E27FC236}">
-                <a16:creationId xmlns:a16="http://schemas.microsoft.com/office/drawing/2014/main" id="{EDA7E009-6C31-4373-BAFF-B220E1616443}"/>
+                <a16:creationId xmlns:a16="http://schemas.microsoft.com/office/drawing/2014/main" id="{2D0FCDE0-D807-48E5-9FF4-1605DC423192}"/>
               </a:ext>
             </a:extLst>
           </p:cNvPr>
@@ -2144,7 +2144,7 @@
           <p:cNvPr id="5" name="slide-subtitle">
             <a:extLst xmlns:a="http://schemas.openxmlformats.org/drawingml/2006/main">
               <a:ext uri="{FF2B5EF4-FFF2-40B4-BE49-F238E27FC236}">
-                <a16:creationId xmlns:a16="http://schemas.microsoft.com/office/drawing/2014/main" id="{E9AB7FB7-7B7C-46C8-862B-408A1D77EC49}"/>
+                <a16:creationId xmlns:a16="http://schemas.microsoft.com/office/drawing/2014/main" id="{BD718B71-9D1A-4674-95E8-275ECB80B3F2}"/>
               </a:ext>
             </a:extLst>
           </p:cNvPr>
@@ -2194,7 +2194,7 @@
           <p:cNvPr id="6" name="bullet-1">
             <a:extLst xmlns:a="http://schemas.openxmlformats.org/drawingml/2006/main">
               <a:ext uri="{FF2B5EF4-FFF2-40B4-BE49-F238E27FC236}">
-                <a16:creationId xmlns:a16="http://schemas.microsoft.com/office/drawing/2014/main" id="{E6E9DA7B-6F9D-481E-8217-5BAF7DB93AA4}"/>
+                <a16:creationId xmlns:a16="http://schemas.microsoft.com/office/drawing/2014/main" id="{BFBF9CA1-8C89-487A-9BB8-881B5505F7F3}"/>
               </a:ext>
             </a:extLst>
           </p:cNvPr>
@@ -2225,7 +2225,7 @@
           <p:cNvPr id="7" name="bullet-number-1">
             <a:extLst xmlns:a="http://schemas.openxmlformats.org/drawingml/2006/main">
               <a:ext uri="{FF2B5EF4-FFF2-40B4-BE49-F238E27FC236}">
-                <a16:creationId xmlns:a16="http://schemas.microsoft.com/office/drawing/2014/main" id="{6212170E-EDB5-466D-9CC9-FEA1EF67938B}"/>
+                <a16:creationId xmlns:a16="http://schemas.microsoft.com/office/drawing/2014/main" id="{E417FED8-094F-418A-AE4E-30C78C7AF368}"/>
               </a:ext>
             </a:extLst>
           </p:cNvPr>
@@ -2275,7 +2275,7 @@
           <p:cNvPr id="8" name="bullet-copy-1">
             <a:extLst xmlns:a="http://schemas.openxmlformats.org/drawingml/2006/main">
               <a:ext uri="{FF2B5EF4-FFF2-40B4-BE49-F238E27FC236}">
-                <a16:creationId xmlns:a16="http://schemas.microsoft.com/office/drawing/2014/main" id="{BEBE8E75-F13E-4A9B-8FC3-5CE2F620882F}"/>
+                <a16:creationId xmlns:a16="http://schemas.microsoft.com/office/drawing/2014/main" id="{03C56837-B57E-416F-8995-AF4A17ACFA2D}"/>
               </a:ext>
             </a:extLst>
           </p:cNvPr>
@@ -2325,7 +2325,7 @@
           <p:cNvPr id="9" name="bullet-2">
             <a:extLst xmlns:a="http://schemas.openxmlformats.org/drawingml/2006/main">
               <a:ext uri="{FF2B5EF4-FFF2-40B4-BE49-F238E27FC236}">
-                <a16:creationId xmlns:a16="http://schemas.microsoft.com/office/drawing/2014/main" id="{DFAC3B2E-06C7-439D-B8FC-2628FA31DC1A}"/>
+                <a16:creationId xmlns:a16="http://schemas.microsoft.com/office/drawing/2014/main" id="{2806FA82-D3DD-4EB8-B3E1-8962F3C51E47}"/>
               </a:ext>
             </a:extLst>
           </p:cNvPr>
@@ -2356,7 +2356,7 @@
           <p:cNvPr id="10" name="bullet-number-2">
             <a:extLst xmlns:a="http://schemas.openxmlformats.org/drawingml/2006/main">
               <a:ext uri="{FF2B5EF4-FFF2-40B4-BE49-F238E27FC236}">
-                <a16:creationId xmlns:a16="http://schemas.microsoft.com/office/drawing/2014/main" id="{05EF30B1-7D7D-4802-A8EA-485CFE559093}"/>
+                <a16:creationId xmlns:a16="http://schemas.microsoft.com/office/drawing/2014/main" id="{15951167-D95C-4ECE-B9DD-857F22F70860}"/>
               </a:ext>
             </a:extLst>
           </p:cNvPr>
@@ -2406,7 +2406,7 @@
           <p:cNvPr id="11" name="bullet-copy-2">
             <a:extLst xmlns:a="http://schemas.openxmlformats.org/drawingml/2006/main">
               <a:ext uri="{FF2B5EF4-FFF2-40B4-BE49-F238E27FC236}">
-                <a16:creationId xmlns:a16="http://schemas.microsoft.com/office/drawing/2014/main" id="{A75AD538-89FB-4FE8-9691-25179F5380E7}"/>
+                <a16:creationId xmlns:a16="http://schemas.microsoft.com/office/drawing/2014/main" id="{F2B796D3-0F16-4392-948A-72553F44EB2A}"/>
               </a:ext>
             </a:extLst>
           </p:cNvPr>
@@ -2456,7 +2456,7 @@
           <p:cNvPr id="12" name="bullet-3">
             <a:extLst xmlns:a="http://schemas.openxmlformats.org/drawingml/2006/main">
               <a:ext uri="{FF2B5EF4-FFF2-40B4-BE49-F238E27FC236}">
-                <a16:creationId xmlns:a16="http://schemas.microsoft.com/office/drawing/2014/main" id="{515C9FBE-C5E4-431C-A89A-068D0803F5E9}"/>
+                <a16:creationId xmlns:a16="http://schemas.microsoft.com/office/drawing/2014/main" id="{F9D92165-5D43-4182-93C0-5BC1B74952F4}"/>
               </a:ext>
             </a:extLst>
           </p:cNvPr>
@@ -2487,7 +2487,7 @@
           <p:cNvPr id="13" name="bullet-number-3">
             <a:extLst xmlns:a="http://schemas.openxmlformats.org/drawingml/2006/main">
               <a:ext uri="{FF2B5EF4-FFF2-40B4-BE49-F238E27FC236}">
-                <a16:creationId xmlns:a16="http://schemas.microsoft.com/office/drawing/2014/main" id="{6D95305C-DCB5-4325-B045-1DE3D955EB9F}"/>
+                <a16:creationId xmlns:a16="http://schemas.microsoft.com/office/drawing/2014/main" id="{9F59E99B-EE14-4F46-8D7F-18C5D45A0449}"/>
               </a:ext>
             </a:extLst>
           </p:cNvPr>
@@ -2537,7 +2537,7 @@
           <p:cNvPr id="14" name="bullet-copy-3">
             <a:extLst xmlns:a="http://schemas.openxmlformats.org/drawingml/2006/main">
               <a:ext uri="{FF2B5EF4-FFF2-40B4-BE49-F238E27FC236}">
-                <a16:creationId xmlns:a16="http://schemas.microsoft.com/office/drawing/2014/main" id="{58FD6A09-6BDB-4315-ABBE-2BB9842CB202}"/>
+                <a16:creationId xmlns:a16="http://schemas.microsoft.com/office/drawing/2014/main" id="{9D953D42-FDD3-4A34-932E-E5643697A77D}"/>
               </a:ext>
             </a:extLst>
           </p:cNvPr>
@@ -2585,7 +2585,7 @@
     </p:spTree>
     <p:extLst>
       <p:ext uri="{BB962C8B-B14F-4D97-AF65-F5344CB8AC3E}">
-        <p14:creationId xmlns:p14="http://schemas.microsoft.com/office/powerpoint/2010/main" val="45623059"/>
+        <p14:creationId xmlns:p14="http://schemas.microsoft.com/office/powerpoint/2010/main" val="1514806401"/>
       </p:ext>
     </p:extLst>
   </p:cSld>
@@ -2616,7 +2616,7 @@
           <p:cNvPr id="15" name="top-rule">
             <a:extLst xmlns:a="http://schemas.openxmlformats.org/drawingml/2006/main">
               <a:ext uri="{FF2B5EF4-FFF2-40B4-BE49-F238E27FC236}">
-                <a16:creationId xmlns:a16="http://schemas.microsoft.com/office/drawing/2014/main" id="{692C4529-C1F2-4496-9B09-07CF0095214E}"/>
+                <a16:creationId xmlns:a16="http://schemas.microsoft.com/office/drawing/2014/main" id="{59530641-BB76-491E-90F7-A7D43DE0C6FE}"/>
               </a:ext>
             </a:extLst>
           </p:cNvPr>
@@ -2647,7 +2647,7 @@
           <p:cNvPr id="2" name="course-label">
             <a:extLst xmlns:a="http://schemas.openxmlformats.org/drawingml/2006/main">
               <a:ext uri="{FF2B5EF4-FFF2-40B4-BE49-F238E27FC236}">
-                <a16:creationId xmlns:a16="http://schemas.microsoft.com/office/drawing/2014/main" id="{3EE743DB-E922-4CF8-8C75-AE04D3001745}"/>
+                <a16:creationId xmlns:a16="http://schemas.microsoft.com/office/drawing/2014/main" id="{2766DDD7-0544-4722-8F2C-69C3EB698AD1}"/>
               </a:ext>
             </a:extLst>
           </p:cNvPr>
@@ -2697,7 +2697,7 @@
           <p:cNvPr id="3" name="module-label">
             <a:extLst xmlns:a="http://schemas.openxmlformats.org/drawingml/2006/main">
               <a:ext uri="{FF2B5EF4-FFF2-40B4-BE49-F238E27FC236}">
-                <a16:creationId xmlns:a16="http://schemas.microsoft.com/office/drawing/2014/main" id="{2D5DA1F4-3208-444E-BC5D-5A26358704F8}"/>
+                <a16:creationId xmlns:a16="http://schemas.microsoft.com/office/drawing/2014/main" id="{CB25DC84-19ED-4019-86EA-71096539CA16}"/>
               </a:ext>
             </a:extLst>
           </p:cNvPr>
@@ -2747,7 +2747,7 @@
           <p:cNvPr id="4" name="slide-title">
             <a:extLst xmlns:a="http://schemas.openxmlformats.org/drawingml/2006/main">
               <a:ext uri="{FF2B5EF4-FFF2-40B4-BE49-F238E27FC236}">
-                <a16:creationId xmlns:a16="http://schemas.microsoft.com/office/drawing/2014/main" id="{62F41563-E797-4B99-B4CC-A9D814205E8A}"/>
+                <a16:creationId xmlns:a16="http://schemas.microsoft.com/office/drawing/2014/main" id="{F5CCFE4B-521D-49CB-87A6-CEF31DB552D3}"/>
               </a:ext>
             </a:extLst>
           </p:cNvPr>
@@ -2797,7 +2797,7 @@
           <p:cNvPr id="5" name="slide-subtitle">
             <a:extLst xmlns:a="http://schemas.openxmlformats.org/drawingml/2006/main">
               <a:ext uri="{FF2B5EF4-FFF2-40B4-BE49-F238E27FC236}">
-                <a16:creationId xmlns:a16="http://schemas.microsoft.com/office/drawing/2014/main" id="{71A041FC-0490-4984-BD8A-31D90AFA412B}"/>
+                <a16:creationId xmlns:a16="http://schemas.microsoft.com/office/drawing/2014/main" id="{9F080923-B79A-4A31-8927-98B97962FF0E}"/>
               </a:ext>
             </a:extLst>
           </p:cNvPr>
@@ -2847,7 +2847,7 @@
           <p:cNvPr id="6" name="bullet-1">
             <a:extLst xmlns:a="http://schemas.openxmlformats.org/drawingml/2006/main">
               <a:ext uri="{FF2B5EF4-FFF2-40B4-BE49-F238E27FC236}">
-                <a16:creationId xmlns:a16="http://schemas.microsoft.com/office/drawing/2014/main" id="{D42C337B-2EC0-41AC-A71E-B44111649BD6}"/>
+                <a16:creationId xmlns:a16="http://schemas.microsoft.com/office/drawing/2014/main" id="{6F5FDE97-EC10-4545-80A2-F809F0B68EF7}"/>
               </a:ext>
             </a:extLst>
           </p:cNvPr>
@@ -2878,7 +2878,7 @@
           <p:cNvPr id="7" name="bullet-number-1">
             <a:extLst xmlns:a="http://schemas.openxmlformats.org/drawingml/2006/main">
               <a:ext uri="{FF2B5EF4-FFF2-40B4-BE49-F238E27FC236}">
-                <a16:creationId xmlns:a16="http://schemas.microsoft.com/office/drawing/2014/main" id="{49BF0598-EF37-4B4F-AE58-E92C216DC36B}"/>
+                <a16:creationId xmlns:a16="http://schemas.microsoft.com/office/drawing/2014/main" id="{79EF5EC4-0A36-4FFA-9A40-AE63E311BAB3}"/>
               </a:ext>
             </a:extLst>
           </p:cNvPr>
@@ -2928,7 +2928,7 @@
           <p:cNvPr id="8" name="bullet-copy-1">
             <a:extLst xmlns:a="http://schemas.openxmlformats.org/drawingml/2006/main">
               <a:ext uri="{FF2B5EF4-FFF2-40B4-BE49-F238E27FC236}">
-                <a16:creationId xmlns:a16="http://schemas.microsoft.com/office/drawing/2014/main" id="{199AABD5-45DD-4287-9078-3510C6C7F219}"/>
+                <a16:creationId xmlns:a16="http://schemas.microsoft.com/office/drawing/2014/main" id="{647C4431-9869-4207-A347-BC70C8ED95B3}"/>
               </a:ext>
             </a:extLst>
           </p:cNvPr>
@@ -2978,7 +2978,7 @@
           <p:cNvPr id="9" name="bullet-2">
             <a:extLst xmlns:a="http://schemas.openxmlformats.org/drawingml/2006/main">
               <a:ext uri="{FF2B5EF4-FFF2-40B4-BE49-F238E27FC236}">
-                <a16:creationId xmlns:a16="http://schemas.microsoft.com/office/drawing/2014/main" id="{24C69C42-03B2-49C3-A92B-B1AABA26E7A9}"/>
+                <a16:creationId xmlns:a16="http://schemas.microsoft.com/office/drawing/2014/main" id="{4AAC6676-BF00-4CD0-8CB7-FF9F66AA9A4F}"/>
               </a:ext>
             </a:extLst>
           </p:cNvPr>
@@ -3009,7 +3009,7 @@
           <p:cNvPr id="10" name="bullet-number-2">
             <a:extLst xmlns:a="http://schemas.openxmlformats.org/drawingml/2006/main">
               <a:ext uri="{FF2B5EF4-FFF2-40B4-BE49-F238E27FC236}">
-                <a16:creationId xmlns:a16="http://schemas.microsoft.com/office/drawing/2014/main" id="{CFE88C0A-93C8-4B51-9164-148FED9E9115}"/>
+                <a16:creationId xmlns:a16="http://schemas.microsoft.com/office/drawing/2014/main" id="{A913AD51-4F8B-4FFD-93AA-3B4C86BAEA7C}"/>
               </a:ext>
             </a:extLst>
           </p:cNvPr>
@@ -3059,7 +3059,7 @@
           <p:cNvPr id="11" name="bullet-copy-2">
             <a:extLst xmlns:a="http://schemas.openxmlformats.org/drawingml/2006/main">
               <a:ext uri="{FF2B5EF4-FFF2-40B4-BE49-F238E27FC236}">
-                <a16:creationId xmlns:a16="http://schemas.microsoft.com/office/drawing/2014/main" id="{161C0090-54BF-4052-9290-7B6A26E85943}"/>
+                <a16:creationId xmlns:a16="http://schemas.microsoft.com/office/drawing/2014/main" id="{28AECE67-C2D9-4D22-977A-76DDBDFBFDEF}"/>
               </a:ext>
             </a:extLst>
           </p:cNvPr>
@@ -3099,7 +3099,7 @@
                   <a:srgbClr val="16343A"/>
                 </a:solidFill>
               </a:rPr>
-              <a:t>Below the fabric, the bobbin supplies a second thread.</a:t>
+              <a:t>A sewing machine creates a lockstitch by coordinating motion and thread.</a:t>
             </a:r>
           </a:p>
         </p:txBody>
@@ -3109,7 +3109,7 @@
           <p:cNvPr id="12" name="bullet-3">
             <a:extLst xmlns:a="http://schemas.openxmlformats.org/drawingml/2006/main">
               <a:ext uri="{FF2B5EF4-FFF2-40B4-BE49-F238E27FC236}">
-                <a16:creationId xmlns:a16="http://schemas.microsoft.com/office/drawing/2014/main" id="{D52822A7-C4DB-4AE6-AD91-FCDC86F942C1}"/>
+                <a16:creationId xmlns:a16="http://schemas.microsoft.com/office/drawing/2014/main" id="{79AA9FA3-9C27-4BFC-A100-4771D1D56DE1}"/>
               </a:ext>
             </a:extLst>
           </p:cNvPr>
@@ -3140,7 +3140,7 @@
           <p:cNvPr id="13" name="bullet-number-3">
             <a:extLst xmlns:a="http://schemas.openxmlformats.org/drawingml/2006/main">
               <a:ext uri="{FF2B5EF4-FFF2-40B4-BE49-F238E27FC236}">
-                <a16:creationId xmlns:a16="http://schemas.microsoft.com/office/drawing/2014/main" id="{BFB7AED9-DDC1-4E3D-B201-97EE6589FA81}"/>
+                <a16:creationId xmlns:a16="http://schemas.microsoft.com/office/drawing/2014/main" id="{BBA9005E-645D-4607-A17B-8D53ED5DF590}"/>
               </a:ext>
             </a:extLst>
           </p:cNvPr>
@@ -3190,7 +3190,7 @@
           <p:cNvPr id="14" name="bullet-copy-3">
             <a:extLst xmlns:a="http://schemas.openxmlformats.org/drawingml/2006/main">
               <a:ext uri="{FF2B5EF4-FFF2-40B4-BE49-F238E27FC236}">
-                <a16:creationId xmlns:a16="http://schemas.microsoft.com/office/drawing/2014/main" id="{43817BEC-DE5E-4081-AE22-CDBCF441E973}"/>
+                <a16:creationId xmlns:a16="http://schemas.microsoft.com/office/drawing/2014/main" id="{C3FF9A0B-12BB-483D-94D1-761363390F9B}"/>
               </a:ext>
             </a:extLst>
           </p:cNvPr>
@@ -3230,7 +3230,7 @@
                   <a:srgbClr val="16343A"/>
                 </a:solidFill>
               </a:rPr>
-              <a:t>The machine interlocks the upper and bobbin threads to form a stitch.</a:t>
+              <a:t>Skipping one stage can change the stitch even when the thread reaches the needle.</a:t>
             </a:r>
           </a:p>
         </p:txBody>
@@ -3238,7 +3238,7 @@
     </p:spTree>
     <p:extLst>
       <p:ext uri="{BB962C8B-B14F-4D97-AF65-F5344CB8AC3E}">
-        <p14:creationId xmlns:p14="http://schemas.microsoft.com/office/powerpoint/2010/main" val="1185155106"/>
+        <p14:creationId xmlns:p14="http://schemas.microsoft.com/office/powerpoint/2010/main" val="1371001808"/>
       </p:ext>
     </p:extLst>
   </p:cSld>
@@ -3269,7 +3269,7 @@
           <p:cNvPr id="12" name="top-rule">
             <a:extLst xmlns:a="http://schemas.openxmlformats.org/drawingml/2006/main">
               <a:ext uri="{FF2B5EF4-FFF2-40B4-BE49-F238E27FC236}">
-                <a16:creationId xmlns:a16="http://schemas.microsoft.com/office/drawing/2014/main" id="{BB9AC199-66CF-4E15-BAE5-A78D64D58135}"/>
+                <a16:creationId xmlns:a16="http://schemas.microsoft.com/office/drawing/2014/main" id="{FCDF4E8C-6CC7-49DA-B893-9520B340599D}"/>
               </a:ext>
             </a:extLst>
           </p:cNvPr>
@@ -3300,7 +3300,7 @@
           <p:cNvPr id="2" name="course-label">
             <a:extLst xmlns:a="http://schemas.openxmlformats.org/drawingml/2006/main">
               <a:ext uri="{FF2B5EF4-FFF2-40B4-BE49-F238E27FC236}">
-                <a16:creationId xmlns:a16="http://schemas.microsoft.com/office/drawing/2014/main" id="{3C9BCBB4-EF50-47EE-B957-D0050BD8D12B}"/>
+                <a16:creationId xmlns:a16="http://schemas.microsoft.com/office/drawing/2014/main" id="{05F76C55-EEB6-4BA3-B897-F6456EA9268A}"/>
               </a:ext>
             </a:extLst>
           </p:cNvPr>
@@ -3350,7 +3350,7 @@
           <p:cNvPr id="3" name="module-label">
             <a:extLst xmlns:a="http://schemas.openxmlformats.org/drawingml/2006/main">
               <a:ext uri="{FF2B5EF4-FFF2-40B4-BE49-F238E27FC236}">
-                <a16:creationId xmlns:a16="http://schemas.microsoft.com/office/drawing/2014/main" id="{67AAEF1D-6E2F-4ED8-B11D-9EFA8C189CDE}"/>
+                <a16:creationId xmlns:a16="http://schemas.microsoft.com/office/drawing/2014/main" id="{04BF0DE0-8505-480F-B7C1-6F08FA4EA979}"/>
               </a:ext>
             </a:extLst>
           </p:cNvPr>
@@ -3400,7 +3400,7 @@
           <p:cNvPr id="4" name="slide-title">
             <a:extLst xmlns:a="http://schemas.openxmlformats.org/drawingml/2006/main">
               <a:ext uri="{FF2B5EF4-FFF2-40B4-BE49-F238E27FC236}">
-                <a16:creationId xmlns:a16="http://schemas.microsoft.com/office/drawing/2014/main" id="{822162AD-A1E8-4D96-9667-23671F2DC3B0}"/>
+                <a16:creationId xmlns:a16="http://schemas.microsoft.com/office/drawing/2014/main" id="{4E1E3EAA-228C-4177-A7EC-DA2C9E03A99D}"/>
               </a:ext>
             </a:extLst>
           </p:cNvPr>
@@ -3450,7 +3450,7 @@
           <p:cNvPr id="5" name="slide-subtitle">
             <a:extLst xmlns:a="http://schemas.openxmlformats.org/drawingml/2006/main">
               <a:ext uri="{FF2B5EF4-FFF2-40B4-BE49-F238E27FC236}">
-                <a16:creationId xmlns:a16="http://schemas.microsoft.com/office/drawing/2014/main" id="{3646B766-7886-4A20-8794-B75D2EA1D56F}"/>
+                <a16:creationId xmlns:a16="http://schemas.microsoft.com/office/drawing/2014/main" id="{71A2BAE7-DFE3-42E8-919F-8A975CEE06A0}"/>
               </a:ext>
             </a:extLst>
           </p:cNvPr>
@@ -3500,7 +3500,7 @@
           <p:cNvPr id="6" name="prompt-accent">
             <a:extLst xmlns:a="http://schemas.openxmlformats.org/drawingml/2006/main">
               <a:ext uri="{FF2B5EF4-FFF2-40B4-BE49-F238E27FC236}">
-                <a16:creationId xmlns:a16="http://schemas.microsoft.com/office/drawing/2014/main" id="{46755C89-8C2B-4732-99BF-10A704EB11C1}"/>
+                <a16:creationId xmlns:a16="http://schemas.microsoft.com/office/drawing/2014/main" id="{F636E696-9694-4D40-909B-E9DE50B5D9AF}"/>
               </a:ext>
             </a:extLst>
           </p:cNvPr>
@@ -3531,7 +3531,7 @@
           <p:cNvPr id="7" name="plain-language">
             <a:extLst xmlns:a="http://schemas.openxmlformats.org/drawingml/2006/main">
               <a:ext uri="{FF2B5EF4-FFF2-40B4-BE49-F238E27FC236}">
-                <a16:creationId xmlns:a16="http://schemas.microsoft.com/office/drawing/2014/main" id="{742AE12E-09B0-464A-88A7-43153E19A8AD}"/>
+                <a16:creationId xmlns:a16="http://schemas.microsoft.com/office/drawing/2014/main" id="{1CB11102-2CDC-43D4-BEC1-4A9EA7C862AC}"/>
               </a:ext>
             </a:extLst>
           </p:cNvPr>
@@ -3581,7 +3581,7 @@
           <p:cNvPr id="8" name="clarify">
             <a:extLst xmlns:a="http://schemas.openxmlformats.org/drawingml/2006/main">
               <a:ext uri="{FF2B5EF4-FFF2-40B4-BE49-F238E27FC236}">
-                <a16:creationId xmlns:a16="http://schemas.microsoft.com/office/drawing/2014/main" id="{59E989F1-F925-4F2D-B2FC-5D38BB8E0D39}"/>
+                <a16:creationId xmlns:a16="http://schemas.microsoft.com/office/drawing/2014/main" id="{EA70E6E3-D191-4004-85A4-C92ED83B8D4F}"/>
               </a:ext>
             </a:extLst>
           </p:cNvPr>
@@ -3631,7 +3631,7 @@
           <p:cNvPr id="9" name="starter-label">
             <a:extLst xmlns:a="http://schemas.openxmlformats.org/drawingml/2006/main">
               <a:ext uri="{FF2B5EF4-FFF2-40B4-BE49-F238E27FC236}">
-                <a16:creationId xmlns:a16="http://schemas.microsoft.com/office/drawing/2014/main" id="{D2B48EE8-C229-4DFC-983D-9E4898A78643}"/>
+                <a16:creationId xmlns:a16="http://schemas.microsoft.com/office/drawing/2014/main" id="{89F8806D-B739-452C-9854-F953723C459B}"/>
               </a:ext>
             </a:extLst>
           </p:cNvPr>
@@ -3681,7 +3681,7 @@
           <p:cNvPr id="10" name="starter">
             <a:extLst xmlns:a="http://schemas.openxmlformats.org/drawingml/2006/main">
               <a:ext uri="{FF2B5EF4-FFF2-40B4-BE49-F238E27FC236}">
-                <a16:creationId xmlns:a16="http://schemas.microsoft.com/office/drawing/2014/main" id="{F218A854-AC25-488F-929C-B7DEFDF03424}"/>
+                <a16:creationId xmlns:a16="http://schemas.microsoft.com/office/drawing/2014/main" id="{F620D74B-29FF-440A-8984-E82786287C85}"/>
               </a:ext>
             </a:extLst>
           </p:cNvPr>
@@ -3731,7 +3731,7 @@
           <p:cNvPr id="11" name="action">
             <a:extLst xmlns:a="http://schemas.openxmlformats.org/drawingml/2006/main">
               <a:ext uri="{FF2B5EF4-FFF2-40B4-BE49-F238E27FC236}">
-                <a16:creationId xmlns:a16="http://schemas.microsoft.com/office/drawing/2014/main" id="{532EB300-47B5-458D-8DE4-CE09A95A9F1F}"/>
+                <a16:creationId xmlns:a16="http://schemas.microsoft.com/office/drawing/2014/main" id="{359A1DC7-FAE0-4727-AD03-EF7DEC66EAD5}"/>
               </a:ext>
             </a:extLst>
           </p:cNvPr>
@@ -3779,7 +3779,7 @@
     </p:spTree>
     <p:extLst>
       <p:ext uri="{BB962C8B-B14F-4D97-AF65-F5344CB8AC3E}">
-        <p14:creationId xmlns:p14="http://schemas.microsoft.com/office/powerpoint/2010/main" val="409468856"/>
+        <p14:creationId xmlns:p14="http://schemas.microsoft.com/office/powerpoint/2010/main" val="864465008"/>
       </p:ext>
     </p:extLst>
   </p:cSld>
@@ -3810,7 +3810,7 @@
           <p:cNvPr id="15" name="top-rule">
             <a:extLst xmlns:a="http://schemas.openxmlformats.org/drawingml/2006/main">
               <a:ext uri="{FF2B5EF4-FFF2-40B4-BE49-F238E27FC236}">
-                <a16:creationId xmlns:a16="http://schemas.microsoft.com/office/drawing/2014/main" id="{94E70ED4-9008-4028-A1FC-BB5D6A1C2282}"/>
+                <a16:creationId xmlns:a16="http://schemas.microsoft.com/office/drawing/2014/main" id="{590BC274-8A0F-4C44-95C2-72B905D8ECAB}"/>
               </a:ext>
             </a:extLst>
           </p:cNvPr>
@@ -3841,7 +3841,7 @@
           <p:cNvPr id="2" name="course-label">
             <a:extLst xmlns:a="http://schemas.openxmlformats.org/drawingml/2006/main">
               <a:ext uri="{FF2B5EF4-FFF2-40B4-BE49-F238E27FC236}">
-                <a16:creationId xmlns:a16="http://schemas.microsoft.com/office/drawing/2014/main" id="{2EB43DB4-4065-49CC-B947-ED99DED0369D}"/>
+                <a16:creationId xmlns:a16="http://schemas.microsoft.com/office/drawing/2014/main" id="{F0C3C273-6DDB-47C7-94AF-A71539F362B1}"/>
               </a:ext>
             </a:extLst>
           </p:cNvPr>
@@ -3891,7 +3891,7 @@
           <p:cNvPr id="3" name="module-label">
             <a:extLst xmlns:a="http://schemas.openxmlformats.org/drawingml/2006/main">
               <a:ext uri="{FF2B5EF4-FFF2-40B4-BE49-F238E27FC236}">
-                <a16:creationId xmlns:a16="http://schemas.microsoft.com/office/drawing/2014/main" id="{2E3DBE4A-D539-4FC8-A69A-7F79420ADDC4}"/>
+                <a16:creationId xmlns:a16="http://schemas.microsoft.com/office/drawing/2014/main" id="{1F36B3C0-E5AA-432D-9256-BAD75877A4D2}"/>
               </a:ext>
             </a:extLst>
           </p:cNvPr>
@@ -3941,7 +3941,7 @@
           <p:cNvPr id="4" name="slide-title">
             <a:extLst xmlns:a="http://schemas.openxmlformats.org/drawingml/2006/main">
               <a:ext uri="{FF2B5EF4-FFF2-40B4-BE49-F238E27FC236}">
-                <a16:creationId xmlns:a16="http://schemas.microsoft.com/office/drawing/2014/main" id="{E1E0B1C9-7C85-4F89-B55E-ADEF35EEE2BD}"/>
+                <a16:creationId xmlns:a16="http://schemas.microsoft.com/office/drawing/2014/main" id="{6AD76095-2BC9-41F3-8CE4-ECB2F72D6482}"/>
               </a:ext>
             </a:extLst>
           </p:cNvPr>
@@ -3991,7 +3991,7 @@
           <p:cNvPr id="5" name="slide-subtitle">
             <a:extLst xmlns:a="http://schemas.openxmlformats.org/drawingml/2006/main">
               <a:ext uri="{FF2B5EF4-FFF2-40B4-BE49-F238E27FC236}">
-                <a16:creationId xmlns:a16="http://schemas.microsoft.com/office/drawing/2014/main" id="{F66D35CB-EAF6-4A7E-8504-013B2C156E9C}"/>
+                <a16:creationId xmlns:a16="http://schemas.microsoft.com/office/drawing/2014/main" id="{BE44A369-8C3D-45D4-95D0-84B6B31BB4B2}"/>
               </a:ext>
             </a:extLst>
           </p:cNvPr>
@@ -4041,7 +4041,7 @@
           <p:cNvPr id="6" name="bullet-1">
             <a:extLst xmlns:a="http://schemas.openxmlformats.org/drawingml/2006/main">
               <a:ext uri="{FF2B5EF4-FFF2-40B4-BE49-F238E27FC236}">
-                <a16:creationId xmlns:a16="http://schemas.microsoft.com/office/drawing/2014/main" id="{C9FC940D-A20F-4109-B123-2503013A106A}"/>
+                <a16:creationId xmlns:a16="http://schemas.microsoft.com/office/drawing/2014/main" id="{2BEC1DAC-397A-4E53-A308-9FE83D9D6127}"/>
               </a:ext>
             </a:extLst>
           </p:cNvPr>
@@ -4072,7 +4072,7 @@
           <p:cNvPr id="7" name="bullet-number-1">
             <a:extLst xmlns:a="http://schemas.openxmlformats.org/drawingml/2006/main">
               <a:ext uri="{FF2B5EF4-FFF2-40B4-BE49-F238E27FC236}">
-                <a16:creationId xmlns:a16="http://schemas.microsoft.com/office/drawing/2014/main" id="{753457A9-1EDD-400B-84FA-64FBE772F050}"/>
+                <a16:creationId xmlns:a16="http://schemas.microsoft.com/office/drawing/2014/main" id="{D3EF37F8-4F52-45F8-83B9-3F52890BCEDC}"/>
               </a:ext>
             </a:extLst>
           </p:cNvPr>
@@ -4122,7 +4122,7 @@
           <p:cNvPr id="8" name="bullet-copy-1">
             <a:extLst xmlns:a="http://schemas.openxmlformats.org/drawingml/2006/main">
               <a:ext uri="{FF2B5EF4-FFF2-40B4-BE49-F238E27FC236}">
-                <a16:creationId xmlns:a16="http://schemas.microsoft.com/office/drawing/2014/main" id="{6252707C-FD75-498D-A992-573487D99518}"/>
+                <a16:creationId xmlns:a16="http://schemas.microsoft.com/office/drawing/2014/main" id="{9C2A1200-B368-4EBC-9352-A296B641ECB7}"/>
               </a:ext>
             </a:extLst>
           </p:cNvPr>
@@ -4172,7 +4172,7 @@
           <p:cNvPr id="9" name="bullet-2">
             <a:extLst xmlns:a="http://schemas.openxmlformats.org/drawingml/2006/main">
               <a:ext uri="{FF2B5EF4-FFF2-40B4-BE49-F238E27FC236}">
-                <a16:creationId xmlns:a16="http://schemas.microsoft.com/office/drawing/2014/main" id="{E47047F5-ADCE-4B40-B12F-9028E7030AEC}"/>
+                <a16:creationId xmlns:a16="http://schemas.microsoft.com/office/drawing/2014/main" id="{EAAB95B4-B7E4-4F38-8468-662CA03A4FD8}"/>
               </a:ext>
             </a:extLst>
           </p:cNvPr>
@@ -4203,7 +4203,7 @@
           <p:cNvPr id="10" name="bullet-number-2">
             <a:extLst xmlns:a="http://schemas.openxmlformats.org/drawingml/2006/main">
               <a:ext uri="{FF2B5EF4-FFF2-40B4-BE49-F238E27FC236}">
-                <a16:creationId xmlns:a16="http://schemas.microsoft.com/office/drawing/2014/main" id="{85A9BEA2-963C-4DDB-86A3-FF953FFC0ACB}"/>
+                <a16:creationId xmlns:a16="http://schemas.microsoft.com/office/drawing/2014/main" id="{7B1197CD-82F9-455C-BDA0-3304FA94AC4B}"/>
               </a:ext>
             </a:extLst>
           </p:cNvPr>
@@ -4253,7 +4253,7 @@
           <p:cNvPr id="11" name="bullet-copy-2">
             <a:extLst xmlns:a="http://schemas.openxmlformats.org/drawingml/2006/main">
               <a:ext uri="{FF2B5EF4-FFF2-40B4-BE49-F238E27FC236}">
-                <a16:creationId xmlns:a16="http://schemas.microsoft.com/office/drawing/2014/main" id="{C9392330-2A83-47BD-9D2C-F0D51AB0E06F}"/>
+                <a16:creationId xmlns:a16="http://schemas.microsoft.com/office/drawing/2014/main" id="{A04E1813-B636-4050-8258-6BB941B3116D}"/>
               </a:ext>
             </a:extLst>
           </p:cNvPr>
@@ -4293,7 +4293,7 @@
                   <a:srgbClr val="16343A"/>
                 </a:solidFill>
               </a:rPr>
-              <a:t>Feed dogs move the fabric in controlled steps as stitches form.</a:t>
+              <a:t>Keep fingers clear of the moving needle and presser-foot area.</a:t>
             </a:r>
           </a:p>
         </p:txBody>
@@ -4303,7 +4303,7 @@
           <p:cNvPr id="12" name="bullet-3">
             <a:extLst xmlns:a="http://schemas.openxmlformats.org/drawingml/2006/main">
               <a:ext uri="{FF2B5EF4-FFF2-40B4-BE49-F238E27FC236}">
-                <a16:creationId xmlns:a16="http://schemas.microsoft.com/office/drawing/2014/main" id="{D2DE494D-0AE1-4D01-92D7-9D0916506A78}"/>
+                <a16:creationId xmlns:a16="http://schemas.microsoft.com/office/drawing/2014/main" id="{5C06F369-2892-40AC-87B7-6F08390C03C1}"/>
               </a:ext>
             </a:extLst>
           </p:cNvPr>
@@ -4334,7 +4334,7 @@
           <p:cNvPr id="13" name="bullet-number-3">
             <a:extLst xmlns:a="http://schemas.openxmlformats.org/drawingml/2006/main">
               <a:ext uri="{FF2B5EF4-FFF2-40B4-BE49-F238E27FC236}">
-                <a16:creationId xmlns:a16="http://schemas.microsoft.com/office/drawing/2014/main" id="{41768321-BF3F-47F9-8A78-1D77F674876B}"/>
+                <a16:creationId xmlns:a16="http://schemas.microsoft.com/office/drawing/2014/main" id="{FDE25C72-9944-4B2B-A724-1A1720DDC750}"/>
               </a:ext>
             </a:extLst>
           </p:cNvPr>
@@ -4384,7 +4384,7 @@
           <p:cNvPr id="14" name="bullet-copy-3">
             <a:extLst xmlns:a="http://schemas.openxmlformats.org/drawingml/2006/main">
               <a:ext uri="{FF2B5EF4-FFF2-40B4-BE49-F238E27FC236}">
-                <a16:creationId xmlns:a16="http://schemas.microsoft.com/office/drawing/2014/main" id="{87A9F99C-68E6-4289-ABC6-48A52C393C7B}"/>
+                <a16:creationId xmlns:a16="http://schemas.microsoft.com/office/drawing/2014/main" id="{9DA946B5-F943-4D8A-B5D6-45A267194AE9}"/>
               </a:ext>
             </a:extLst>
           </p:cNvPr>
@@ -4424,7 +4424,7 @@
                   <a:srgbClr val="16343A"/>
                 </a:solidFill>
               </a:rPr>
-              <a:t>The needle plate supports the fabric and provides an opening for the needle.</a:t>
+              <a:t>Pulling the fabric fights this system and can distort the seam or place sideways force on the needle.</a:t>
             </a:r>
           </a:p>
         </p:txBody>
@@ -4432,7 +4432,7 @@
     </p:spTree>
     <p:extLst>
       <p:ext uri="{BB962C8B-B14F-4D97-AF65-F5344CB8AC3E}">
-        <p14:creationId xmlns:p14="http://schemas.microsoft.com/office/powerpoint/2010/main" val="175798697"/>
+        <p14:creationId xmlns:p14="http://schemas.microsoft.com/office/powerpoint/2010/main" val="749664924"/>
       </p:ext>
     </p:extLst>
   </p:cSld>
@@ -4463,7 +4463,7 @@
           <p:cNvPr id="12" name="top-rule">
             <a:extLst xmlns:a="http://schemas.openxmlformats.org/drawingml/2006/main">
               <a:ext uri="{FF2B5EF4-FFF2-40B4-BE49-F238E27FC236}">
-                <a16:creationId xmlns:a16="http://schemas.microsoft.com/office/drawing/2014/main" id="{BBA72C37-8E0A-41C4-82FC-93A800C57FA5}"/>
+                <a16:creationId xmlns:a16="http://schemas.microsoft.com/office/drawing/2014/main" id="{A70518B5-47C7-4188-BF6B-5FD67FD877F0}"/>
               </a:ext>
             </a:extLst>
           </p:cNvPr>
@@ -4494,7 +4494,7 @@
           <p:cNvPr id="2" name="course-label">
             <a:extLst xmlns:a="http://schemas.openxmlformats.org/drawingml/2006/main">
               <a:ext uri="{FF2B5EF4-FFF2-40B4-BE49-F238E27FC236}">
-                <a16:creationId xmlns:a16="http://schemas.microsoft.com/office/drawing/2014/main" id="{A69C2657-6226-41E1-871A-85F8BF4D81C3}"/>
+                <a16:creationId xmlns:a16="http://schemas.microsoft.com/office/drawing/2014/main" id="{835B630A-C6EE-4D48-8A1B-E84F179972C5}"/>
               </a:ext>
             </a:extLst>
           </p:cNvPr>
@@ -4544,7 +4544,7 @@
           <p:cNvPr id="3" name="module-label">
             <a:extLst xmlns:a="http://schemas.openxmlformats.org/drawingml/2006/main">
               <a:ext uri="{FF2B5EF4-FFF2-40B4-BE49-F238E27FC236}">
-                <a16:creationId xmlns:a16="http://schemas.microsoft.com/office/drawing/2014/main" id="{EBAB03F2-74EB-48F3-B21E-C1544A15ABA5}"/>
+                <a16:creationId xmlns:a16="http://schemas.microsoft.com/office/drawing/2014/main" id="{D049C56A-0493-4CC1-B5C1-86C0570C29CC}"/>
               </a:ext>
             </a:extLst>
           </p:cNvPr>
@@ -4594,7 +4594,7 @@
           <p:cNvPr id="4" name="slide-title">
             <a:extLst xmlns:a="http://schemas.openxmlformats.org/drawingml/2006/main">
               <a:ext uri="{FF2B5EF4-FFF2-40B4-BE49-F238E27FC236}">
-                <a16:creationId xmlns:a16="http://schemas.microsoft.com/office/drawing/2014/main" id="{A573C5E0-5391-4A82-A381-402BC864EE88}"/>
+                <a16:creationId xmlns:a16="http://schemas.microsoft.com/office/drawing/2014/main" id="{651F233F-D7E4-4A8C-A863-30F886922E54}"/>
               </a:ext>
             </a:extLst>
           </p:cNvPr>
@@ -4644,7 +4644,7 @@
           <p:cNvPr id="5" name="slide-subtitle">
             <a:extLst xmlns:a="http://schemas.openxmlformats.org/drawingml/2006/main">
               <a:ext uri="{FF2B5EF4-FFF2-40B4-BE49-F238E27FC236}">
-                <a16:creationId xmlns:a16="http://schemas.microsoft.com/office/drawing/2014/main" id="{27C58C0E-36E7-4A7E-8DE1-76368399EC7C}"/>
+                <a16:creationId xmlns:a16="http://schemas.microsoft.com/office/drawing/2014/main" id="{6482FB0B-0D88-496C-A534-BDD32C2264AF}"/>
               </a:ext>
             </a:extLst>
           </p:cNvPr>
@@ -4694,7 +4694,7 @@
           <p:cNvPr id="6" name="prompt-accent">
             <a:extLst xmlns:a="http://schemas.openxmlformats.org/drawingml/2006/main">
               <a:ext uri="{FF2B5EF4-FFF2-40B4-BE49-F238E27FC236}">
-                <a16:creationId xmlns:a16="http://schemas.microsoft.com/office/drawing/2014/main" id="{678D6650-95D9-4919-A108-5C2A141847F3}"/>
+                <a16:creationId xmlns:a16="http://schemas.microsoft.com/office/drawing/2014/main" id="{5F862DC3-24C0-4E8B-8497-2C91B5CC69A3}"/>
               </a:ext>
             </a:extLst>
           </p:cNvPr>
@@ -4725,7 +4725,7 @@
           <p:cNvPr id="7" name="plain-language">
             <a:extLst xmlns:a="http://schemas.openxmlformats.org/drawingml/2006/main">
               <a:ext uri="{FF2B5EF4-FFF2-40B4-BE49-F238E27FC236}">
-                <a16:creationId xmlns:a16="http://schemas.microsoft.com/office/drawing/2014/main" id="{1FF9A8E5-322C-4EFF-BEFF-3F0AE06E4EF4}"/>
+                <a16:creationId xmlns:a16="http://schemas.microsoft.com/office/drawing/2014/main" id="{0C4D0005-303B-4C89-AE24-91DA6027B535}"/>
               </a:ext>
             </a:extLst>
           </p:cNvPr>
@@ -4775,7 +4775,7 @@
           <p:cNvPr id="8" name="clarify">
             <a:extLst xmlns:a="http://schemas.openxmlformats.org/drawingml/2006/main">
               <a:ext uri="{FF2B5EF4-FFF2-40B4-BE49-F238E27FC236}">
-                <a16:creationId xmlns:a16="http://schemas.microsoft.com/office/drawing/2014/main" id="{1CDEBBE5-61DD-464A-86A0-9570BC6EA1FC}"/>
+                <a16:creationId xmlns:a16="http://schemas.microsoft.com/office/drawing/2014/main" id="{CF569717-2496-40DA-A827-516A02873487}"/>
               </a:ext>
             </a:extLst>
           </p:cNvPr>
@@ -4825,7 +4825,7 @@
           <p:cNvPr id="9" name="starter-label">
             <a:extLst xmlns:a="http://schemas.openxmlformats.org/drawingml/2006/main">
               <a:ext uri="{FF2B5EF4-FFF2-40B4-BE49-F238E27FC236}">
-                <a16:creationId xmlns:a16="http://schemas.microsoft.com/office/drawing/2014/main" id="{4756D277-85EE-432D-9D6F-28B6AE899D46}"/>
+                <a16:creationId xmlns:a16="http://schemas.microsoft.com/office/drawing/2014/main" id="{7BDBCA4C-437F-465D-B3B8-67F324D4372F}"/>
               </a:ext>
             </a:extLst>
           </p:cNvPr>
@@ -4875,7 +4875,7 @@
           <p:cNvPr id="10" name="starter">
             <a:extLst xmlns:a="http://schemas.openxmlformats.org/drawingml/2006/main">
               <a:ext uri="{FF2B5EF4-FFF2-40B4-BE49-F238E27FC236}">
-                <a16:creationId xmlns:a16="http://schemas.microsoft.com/office/drawing/2014/main" id="{B0E2A186-27C1-4745-8BCE-41CF12B5FACE}"/>
+                <a16:creationId xmlns:a16="http://schemas.microsoft.com/office/drawing/2014/main" id="{5918EC7C-9F4D-4C35-9929-21B5B1E40140}"/>
               </a:ext>
             </a:extLst>
           </p:cNvPr>
@@ -4925,7 +4925,7 @@
           <p:cNvPr id="11" name="action">
             <a:extLst xmlns:a="http://schemas.openxmlformats.org/drawingml/2006/main">
               <a:ext uri="{FF2B5EF4-FFF2-40B4-BE49-F238E27FC236}">
-                <a16:creationId xmlns:a16="http://schemas.microsoft.com/office/drawing/2014/main" id="{49FE77B9-711D-4677-AA70-E14113BC2932}"/>
+                <a16:creationId xmlns:a16="http://schemas.microsoft.com/office/drawing/2014/main" id="{D41EA56C-9FFF-4F59-B1DB-AF6F86F34AD2}"/>
               </a:ext>
             </a:extLst>
           </p:cNvPr>
@@ -4973,7 +4973,7 @@
     </p:spTree>
     <p:extLst>
       <p:ext uri="{BB962C8B-B14F-4D97-AF65-F5344CB8AC3E}">
-        <p14:creationId xmlns:p14="http://schemas.microsoft.com/office/powerpoint/2010/main" val="1554281628"/>
+        <p14:creationId xmlns:p14="http://schemas.microsoft.com/office/powerpoint/2010/main" val="648696946"/>
       </p:ext>
     </p:extLst>
   </p:cSld>
@@ -5004,7 +5004,7 @@
           <p:cNvPr id="15" name="top-rule">
             <a:extLst xmlns:a="http://schemas.openxmlformats.org/drawingml/2006/main">
               <a:ext uri="{FF2B5EF4-FFF2-40B4-BE49-F238E27FC236}">
-                <a16:creationId xmlns:a16="http://schemas.microsoft.com/office/drawing/2014/main" id="{D4B660B2-A980-445D-8726-5C8A6E111407}"/>
+                <a16:creationId xmlns:a16="http://schemas.microsoft.com/office/drawing/2014/main" id="{28665A43-82FC-4D50-BC4D-DF75F04076DD}"/>
               </a:ext>
             </a:extLst>
           </p:cNvPr>
@@ -5035,7 +5035,7 @@
           <p:cNvPr id="2" name="course-label">
             <a:extLst xmlns:a="http://schemas.openxmlformats.org/drawingml/2006/main">
               <a:ext uri="{FF2B5EF4-FFF2-40B4-BE49-F238E27FC236}">
-                <a16:creationId xmlns:a16="http://schemas.microsoft.com/office/drawing/2014/main" id="{2185B93D-EB85-47C1-90C4-1B5EC0709E37}"/>
+                <a16:creationId xmlns:a16="http://schemas.microsoft.com/office/drawing/2014/main" id="{62796C60-E960-4693-9DB7-1D7752A5BAF4}"/>
               </a:ext>
             </a:extLst>
           </p:cNvPr>
@@ -5085,7 +5085,7 @@
           <p:cNvPr id="3" name="module-label">
             <a:extLst xmlns:a="http://schemas.openxmlformats.org/drawingml/2006/main">
               <a:ext uri="{FF2B5EF4-FFF2-40B4-BE49-F238E27FC236}">
-                <a16:creationId xmlns:a16="http://schemas.microsoft.com/office/drawing/2014/main" id="{05B96F69-AEC4-4565-8D14-1FBBDB45F3B4}"/>
+                <a16:creationId xmlns:a16="http://schemas.microsoft.com/office/drawing/2014/main" id="{3FDB2104-6D0D-4FA2-893C-14D16EE85B44}"/>
               </a:ext>
             </a:extLst>
           </p:cNvPr>
@@ -5135,7 +5135,7 @@
           <p:cNvPr id="4" name="slide-title">
             <a:extLst xmlns:a="http://schemas.openxmlformats.org/drawingml/2006/main">
               <a:ext uri="{FF2B5EF4-FFF2-40B4-BE49-F238E27FC236}">
-                <a16:creationId xmlns:a16="http://schemas.microsoft.com/office/drawing/2014/main" id="{CFAF259D-C839-4F8C-A6F6-5B96EF15AFB4}"/>
+                <a16:creationId xmlns:a16="http://schemas.microsoft.com/office/drawing/2014/main" id="{71D0A857-D267-42B9-A0EC-AB57B23AB094}"/>
               </a:ext>
             </a:extLst>
           </p:cNvPr>
@@ -5185,7 +5185,7 @@
           <p:cNvPr id="5" name="slide-subtitle">
             <a:extLst xmlns:a="http://schemas.openxmlformats.org/drawingml/2006/main">
               <a:ext uri="{FF2B5EF4-FFF2-40B4-BE49-F238E27FC236}">
-                <a16:creationId xmlns:a16="http://schemas.microsoft.com/office/drawing/2014/main" id="{DE22AB5D-B2A8-4CE4-ABD2-0BEFDC2F1D53}"/>
+                <a16:creationId xmlns:a16="http://schemas.microsoft.com/office/drawing/2014/main" id="{ED38D951-7B20-4803-9A86-93A16A4E8BD3}"/>
               </a:ext>
             </a:extLst>
           </p:cNvPr>
@@ -5235,7 +5235,7 @@
           <p:cNvPr id="6" name="bullet-1">
             <a:extLst xmlns:a="http://schemas.openxmlformats.org/drawingml/2006/main">
               <a:ext uri="{FF2B5EF4-FFF2-40B4-BE49-F238E27FC236}">
-                <a16:creationId xmlns:a16="http://schemas.microsoft.com/office/drawing/2014/main" id="{2E7BE680-8DB7-4E52-B282-9916599C2A58}"/>
+                <a16:creationId xmlns:a16="http://schemas.microsoft.com/office/drawing/2014/main" id="{E8A70030-7837-4295-982E-A270AB490C43}"/>
               </a:ext>
             </a:extLst>
           </p:cNvPr>
@@ -5266,7 +5266,7 @@
           <p:cNvPr id="7" name="bullet-number-1">
             <a:extLst xmlns:a="http://schemas.openxmlformats.org/drawingml/2006/main">
               <a:ext uri="{FF2B5EF4-FFF2-40B4-BE49-F238E27FC236}">
-                <a16:creationId xmlns:a16="http://schemas.microsoft.com/office/drawing/2014/main" id="{53B41CF5-5CD3-4C92-AEBF-6DEE951D1235}"/>
+                <a16:creationId xmlns:a16="http://schemas.microsoft.com/office/drawing/2014/main" id="{F08A5FFF-54E0-4ED9-8CB0-418DCCB6D8C0}"/>
               </a:ext>
             </a:extLst>
           </p:cNvPr>
@@ -5316,7 +5316,7 @@
           <p:cNvPr id="8" name="bullet-copy-1">
             <a:extLst xmlns:a="http://schemas.openxmlformats.org/drawingml/2006/main">
               <a:ext uri="{FF2B5EF4-FFF2-40B4-BE49-F238E27FC236}">
-                <a16:creationId xmlns:a16="http://schemas.microsoft.com/office/drawing/2014/main" id="{63E2325A-8297-4A42-853A-851D33085FE9}"/>
+                <a16:creationId xmlns:a16="http://schemas.microsoft.com/office/drawing/2014/main" id="{7106F66F-715F-4281-934B-7E9C68B5BD94}"/>
               </a:ext>
             </a:extLst>
           </p:cNvPr>
@@ -5366,7 +5366,7 @@
           <p:cNvPr id="9" name="bullet-2">
             <a:extLst xmlns:a="http://schemas.openxmlformats.org/drawingml/2006/main">
               <a:ext uri="{FF2B5EF4-FFF2-40B4-BE49-F238E27FC236}">
-                <a16:creationId xmlns:a16="http://schemas.microsoft.com/office/drawing/2014/main" id="{20A1ECD1-A22D-4BEB-B798-A6CCCA7C0595}"/>
+                <a16:creationId xmlns:a16="http://schemas.microsoft.com/office/drawing/2014/main" id="{94CB01F7-9608-4173-96E3-08EF56D14EE5}"/>
               </a:ext>
             </a:extLst>
           </p:cNvPr>
@@ -5397,7 +5397,7 @@
           <p:cNvPr id="10" name="bullet-number-2">
             <a:extLst xmlns:a="http://schemas.openxmlformats.org/drawingml/2006/main">
               <a:ext uri="{FF2B5EF4-FFF2-40B4-BE49-F238E27FC236}">
-                <a16:creationId xmlns:a16="http://schemas.microsoft.com/office/drawing/2014/main" id="{13410E02-A60D-49E4-8D27-4E204CD2B7D8}"/>
+                <a16:creationId xmlns:a16="http://schemas.microsoft.com/office/drawing/2014/main" id="{7702412D-1FCB-4FD2-B9B2-D03D85B62A23}"/>
               </a:ext>
             </a:extLst>
           </p:cNvPr>
@@ -5447,7 +5447,7 @@
           <p:cNvPr id="11" name="bullet-copy-2">
             <a:extLst xmlns:a="http://schemas.openxmlformats.org/drawingml/2006/main">
               <a:ext uri="{FF2B5EF4-FFF2-40B4-BE49-F238E27FC236}">
-                <a16:creationId xmlns:a16="http://schemas.microsoft.com/office/drawing/2014/main" id="{73590187-837F-4A7F-AB96-ACD8180E5864}"/>
+                <a16:creationId xmlns:a16="http://schemas.microsoft.com/office/drawing/2014/main" id="{6699BE42-2BFD-4DCE-8C0F-5D0CBC4567F4}"/>
               </a:ext>
             </a:extLst>
           </p:cNvPr>
@@ -5487,7 +5487,7 @@
                   <a:srgbClr val="16343A"/>
                 </a:solidFill>
               </a:rPr>
-              <a:t>Their exact position and operation depend on the machine model.</a:t>
+              <a:t>The handwheel positions the needle under the demonstrated method; the reverse control may secure stitching; stitch selectors and length controls change stitch formati…</a:t>
             </a:r>
           </a:p>
         </p:txBody>
@@ -5497,7 +5497,7 @@
           <p:cNvPr id="12" name="bullet-3">
             <a:extLst xmlns:a="http://schemas.openxmlformats.org/drawingml/2006/main">
               <a:ext uri="{FF2B5EF4-FFF2-40B4-BE49-F238E27FC236}">
-                <a16:creationId xmlns:a16="http://schemas.microsoft.com/office/drawing/2014/main" id="{3FF1575B-DB89-422B-849B-881B751C7249}"/>
+                <a16:creationId xmlns:a16="http://schemas.microsoft.com/office/drawing/2014/main" id="{7821BC3B-F530-4C5A-838A-FB6905277B91}"/>
               </a:ext>
             </a:extLst>
           </p:cNvPr>
@@ -5528,7 +5528,7 @@
           <p:cNvPr id="13" name="bullet-number-3">
             <a:extLst xmlns:a="http://schemas.openxmlformats.org/drawingml/2006/main">
               <a:ext uri="{FF2B5EF4-FFF2-40B4-BE49-F238E27FC236}">
-                <a16:creationId xmlns:a16="http://schemas.microsoft.com/office/drawing/2014/main" id="{A62C9D9C-80A7-427D-8E54-4B1F9B582474}"/>
+                <a16:creationId xmlns:a16="http://schemas.microsoft.com/office/drawing/2014/main" id="{27ACE79B-6CCF-4FFC-BA85-AF11BA429715}"/>
               </a:ext>
             </a:extLst>
           </p:cNvPr>
@@ -5578,7 +5578,7 @@
           <p:cNvPr id="14" name="bullet-copy-3">
             <a:extLst xmlns:a="http://schemas.openxmlformats.org/drawingml/2006/main">
               <a:ext uri="{FF2B5EF4-FFF2-40B4-BE49-F238E27FC236}">
-                <a16:creationId xmlns:a16="http://schemas.microsoft.com/office/drawing/2014/main" id="{D79D93EB-2F22-4B97-B729-11BA7DECA478}"/>
+                <a16:creationId xmlns:a16="http://schemas.microsoft.com/office/drawing/2014/main" id="{1B91ED8C-565C-4DFD-8001-DAF0A3051659}"/>
               </a:ext>
             </a:extLst>
           </p:cNvPr>
@@ -5618,7 +5618,7 @@
                   <a:srgbClr val="16343A"/>
                 </a:solidFill>
               </a:rPr>
-              <a:t>Part numbers, settings and the approved starting configuration are Teacher to confirm from the classroom machine and demonstration.</a:t>
+              <a:t>Record model-specific values only after teacher confirmation.</a:t>
             </a:r>
           </a:p>
         </p:txBody>
@@ -5626,7 +5626,7 @@
     </p:spTree>
     <p:extLst>
       <p:ext uri="{BB962C8B-B14F-4D97-AF65-F5344CB8AC3E}">
-        <p14:creationId xmlns:p14="http://schemas.microsoft.com/office/powerpoint/2010/main" val="1420919044"/>
+        <p14:creationId xmlns:p14="http://schemas.microsoft.com/office/powerpoint/2010/main" val="331104563"/>
       </p:ext>
     </p:extLst>
   </p:cSld>
@@ -5657,7 +5657,7 @@
           <p:cNvPr id="6" name="closing-rule">
             <a:extLst xmlns:a="http://schemas.openxmlformats.org/drawingml/2006/main">
               <a:ext uri="{FF2B5EF4-FFF2-40B4-BE49-F238E27FC236}">
-                <a16:creationId xmlns:a16="http://schemas.microsoft.com/office/drawing/2014/main" id="{C04EFF0F-28E5-470A-B51E-369F36B4C3A2}"/>
+                <a16:creationId xmlns:a16="http://schemas.microsoft.com/office/drawing/2014/main" id="{BB3C775B-314F-41A9-8A7D-BB81D801B953}"/>
               </a:ext>
             </a:extLst>
           </p:cNvPr>
@@ -5688,7 +5688,7 @@
           <p:cNvPr id="2" name="closing-kicker">
             <a:extLst xmlns:a="http://schemas.openxmlformats.org/drawingml/2006/main">
               <a:ext uri="{FF2B5EF4-FFF2-40B4-BE49-F238E27FC236}">
-                <a16:creationId xmlns:a16="http://schemas.microsoft.com/office/drawing/2014/main" id="{FEAB83E6-1B6C-4FAA-99AF-8EA3F3C0D674}"/>
+                <a16:creationId xmlns:a16="http://schemas.microsoft.com/office/drawing/2014/main" id="{5446463F-E089-4683-B6BC-4FA57E68E64F}"/>
               </a:ext>
             </a:extLst>
           </p:cNvPr>
@@ -5738,7 +5738,7 @@
           <p:cNvPr id="3" name="closing-title">
             <a:extLst xmlns:a="http://schemas.openxmlformats.org/drawingml/2006/main">
               <a:ext uri="{FF2B5EF4-FFF2-40B4-BE49-F238E27FC236}">
-                <a16:creationId xmlns:a16="http://schemas.microsoft.com/office/drawing/2014/main" id="{246548AE-450E-4EC3-9E4B-498A26F69F49}"/>
+                <a16:creationId xmlns:a16="http://schemas.microsoft.com/office/drawing/2014/main" id="{72C0BDF2-624F-4771-B585-A1AD86D61647}"/>
               </a:ext>
             </a:extLst>
           </p:cNvPr>
@@ -5788,7 +5788,7 @@
           <p:cNvPr id="4" name="closing-copy">
             <a:extLst xmlns:a="http://schemas.openxmlformats.org/drawingml/2006/main">
               <a:ext uri="{FF2B5EF4-FFF2-40B4-BE49-F238E27FC236}">
-                <a16:creationId xmlns:a16="http://schemas.microsoft.com/office/drawing/2014/main" id="{71E0EC5C-2DD2-4A31-ACF5-39B638C0531C}"/>
+                <a16:creationId xmlns:a16="http://schemas.microsoft.com/office/drawing/2014/main" id="{511956F2-290C-4DAC-8FCB-779E53F35C0A}"/>
               </a:ext>
             </a:extLst>
           </p:cNvPr>
@@ -5862,7 +5862,7 @@
                   <a:srgbClr val="E6F2EF"/>
                 </a:solidFill>
               </a:rPr>
-              <a:t>3. Continue Project Activity 6 and keep authentic evidence.</a:t>
+              <a:t>3. Continue the Sewing machine systems lab and keep authentic evidence.</a:t>
             </a:r>
           </a:p>
         </p:txBody>
@@ -5872,7 +5872,7 @@
           <p:cNvPr id="5" name="closing-boundary">
             <a:extLst xmlns:a="http://schemas.openxmlformats.org/drawingml/2006/main">
               <a:ext uri="{FF2B5EF4-FFF2-40B4-BE49-F238E27FC236}">
-                <a16:creationId xmlns:a16="http://schemas.microsoft.com/office/drawing/2014/main" id="{19803F67-0282-4ED6-A575-286F93EF314D}"/>
+                <a16:creationId xmlns:a16="http://schemas.microsoft.com/office/drawing/2014/main" id="{9F0C9E99-0925-494A-BA08-FFC2C86A9DF9}"/>
               </a:ext>
             </a:extLst>
           </p:cNvPr>
@@ -5920,7 +5920,7 @@
     </p:spTree>
     <p:extLst>
       <p:ext uri="{BB962C8B-B14F-4D97-AF65-F5344CB8AC3E}">
-        <p14:creationId xmlns:p14="http://schemas.microsoft.com/office/powerpoint/2010/main" val="1883413743"/>
+        <p14:creationId xmlns:p14="http://schemas.microsoft.com/office/powerpoint/2010/main" val="1509371865"/>
       </p:ext>
     </p:extLst>
   </p:cSld>
